--- a/doc/Architecture.pptx
+++ b/doc/Architecture.pptx
@@ -5,10 +5,11 @@
     <p:sldMasterId id="2147483648" r:id="rId1"/>
   </p:sldMasterIdLst>
   <p:notesMasterIdLst>
-    <p:notesMasterId r:id="rId3"/>
+    <p:notesMasterId r:id="rId4"/>
   </p:notesMasterIdLst>
   <p:sldIdLst>
     <p:sldId id="262" r:id="rId2"/>
+    <p:sldId id="263" r:id="rId3"/>
   </p:sldIdLst>
   <p:sldSz cx="12192000" cy="6858000"/>
   <p:notesSz cx="6858000" cy="9144000"/>
@@ -197,7 +198,7 @@
           <a:p>
             <a:fld id="{5C800FBA-AC49-2849-BDEC-7B1E86DFA38B}" type="datetimeFigureOut">
               <a:rPr lang="en-US" smtClean="0"/>
-              <a:t>12/27/25</a:t>
+              <a:t>4/8/26</a:t>
             </a:fld>
             <a:endParaRPr lang="en-US"/>
           </a:p>
@@ -548,6 +549,90 @@
 </p:notes>
 </file>
 
+<file path=ppt/notesSlides/notesSlide2.xml><?xml version="1.0" encoding="utf-8"?>
+<p:notes xmlns:a="http://schemas.openxmlformats.org/drawingml/2006/main" xmlns:r="http://schemas.openxmlformats.org/officeDocument/2006/relationships" xmlns:p="http://schemas.openxmlformats.org/presentationml/2006/main">
+  <p:cSld>
+    <p:spTree>
+      <p:nvGrpSpPr>
+        <p:cNvPr id="1" name=""/>
+        <p:cNvGrpSpPr/>
+        <p:nvPr/>
+      </p:nvGrpSpPr>
+      <p:grpSpPr>
+        <a:xfrm>
+          <a:off x="0" y="0"/>
+          <a:ext cx="0" cy="0"/>
+          <a:chOff x="0" y="0"/>
+          <a:chExt cx="0" cy="0"/>
+        </a:xfrm>
+      </p:grpSpPr>
+      <p:sp>
+        <p:nvSpPr>
+          <p:cNvPr id="2" name="Slide Image Placeholder 1"/>
+          <p:cNvSpPr>
+            <a:spLocks noGrp="1" noRot="1" noChangeAspect="1"/>
+          </p:cNvSpPr>
+          <p:nvPr>
+            <p:ph type="sldImg"/>
+          </p:nvPr>
+        </p:nvSpPr>
+        <p:spPr/>
+      </p:sp>
+      <p:sp>
+        <p:nvSpPr>
+          <p:cNvPr id="3" name="Notes Placeholder 2"/>
+          <p:cNvSpPr>
+            <a:spLocks noGrp="1"/>
+          </p:cNvSpPr>
+          <p:nvPr>
+            <p:ph type="body" idx="1"/>
+          </p:nvPr>
+        </p:nvSpPr>
+        <p:spPr/>
+        <p:txBody>
+          <a:bodyPr/>
+          <a:lstStyle/>
+          <a:p>
+            <a:endParaRPr lang="en-US" dirty="0"/>
+          </a:p>
+        </p:txBody>
+      </p:sp>
+      <p:sp>
+        <p:nvSpPr>
+          <p:cNvPr id="4" name="Slide Number Placeholder 3"/>
+          <p:cNvSpPr>
+            <a:spLocks noGrp="1"/>
+          </p:cNvSpPr>
+          <p:nvPr>
+            <p:ph type="sldNum" sz="quarter" idx="5"/>
+          </p:nvPr>
+        </p:nvSpPr>
+        <p:spPr/>
+        <p:txBody>
+          <a:bodyPr/>
+          <a:lstStyle/>
+          <a:p>
+            <a:fld id="{E11ABA56-C4F8-2043-8278-01E9F67ADAE0}" type="slidenum">
+              <a:rPr lang="en-US" smtClean="0"/>
+              <a:t>2</a:t>
+            </a:fld>
+            <a:endParaRPr lang="en-US"/>
+          </a:p>
+        </p:txBody>
+      </p:sp>
+    </p:spTree>
+    <p:extLst>
+      <p:ext uri="{BB962C8B-B14F-4D97-AF65-F5344CB8AC3E}">
+        <p14:creationId xmlns:p14="http://schemas.microsoft.com/office/powerpoint/2010/main" val="1196269217"/>
+      </p:ext>
+    </p:extLst>
+  </p:cSld>
+  <p:clrMapOvr>
+    <a:masterClrMapping/>
+  </p:clrMapOvr>
+</p:notes>
+</file>
+
 <file path=ppt/slideLayouts/slideLayout1.xml><?xml version="1.0" encoding="utf-8"?>
 <p:sldLayout xmlns:a="http://schemas.openxmlformats.org/drawingml/2006/main" xmlns:r="http://schemas.openxmlformats.org/officeDocument/2006/relationships" xmlns:p="http://schemas.openxmlformats.org/presentationml/2006/main" type="title" preserve="1">
   <p:cSld name="Title Slide">
@@ -695,7 +780,7 @@
           <a:p>
             <a:fld id="{3FAC01E6-7D67-744B-A9B5-351F18CCB29F}" type="datetimeFigureOut">
               <a:rPr lang="en-US" smtClean="0"/>
-              <a:t>12/27/25</a:t>
+              <a:t>4/8/26</a:t>
             </a:fld>
             <a:endParaRPr lang="en-US"/>
           </a:p>
@@ -893,7 +978,7 @@
           <a:p>
             <a:fld id="{3FAC01E6-7D67-744B-A9B5-351F18CCB29F}" type="datetimeFigureOut">
               <a:rPr lang="en-US" smtClean="0"/>
-              <a:t>12/27/25</a:t>
+              <a:t>4/8/26</a:t>
             </a:fld>
             <a:endParaRPr lang="en-US"/>
           </a:p>
@@ -1101,7 +1186,7 @@
           <a:p>
             <a:fld id="{3FAC01E6-7D67-744B-A9B5-351F18CCB29F}" type="datetimeFigureOut">
               <a:rPr lang="en-US" smtClean="0"/>
-              <a:t>12/27/25</a:t>
+              <a:t>4/8/26</a:t>
             </a:fld>
             <a:endParaRPr lang="en-US"/>
           </a:p>
@@ -1299,7 +1384,7 @@
           <a:p>
             <a:fld id="{3FAC01E6-7D67-744B-A9B5-351F18CCB29F}" type="datetimeFigureOut">
               <a:rPr lang="en-US" smtClean="0"/>
-              <a:t>12/27/25</a:t>
+              <a:t>4/8/26</a:t>
             </a:fld>
             <a:endParaRPr lang="en-US"/>
           </a:p>
@@ -1574,7 +1659,7 @@
           <a:p>
             <a:fld id="{3FAC01E6-7D67-744B-A9B5-351F18CCB29F}" type="datetimeFigureOut">
               <a:rPr lang="en-US" smtClean="0"/>
-              <a:t>12/27/25</a:t>
+              <a:t>4/8/26</a:t>
             </a:fld>
             <a:endParaRPr lang="en-US"/>
           </a:p>
@@ -1839,7 +1924,7 @@
           <a:p>
             <a:fld id="{3FAC01E6-7D67-744B-A9B5-351F18CCB29F}" type="datetimeFigureOut">
               <a:rPr lang="en-US" smtClean="0"/>
-              <a:t>12/27/25</a:t>
+              <a:t>4/8/26</a:t>
             </a:fld>
             <a:endParaRPr lang="en-US"/>
           </a:p>
@@ -2251,7 +2336,7 @@
           <a:p>
             <a:fld id="{3FAC01E6-7D67-744B-A9B5-351F18CCB29F}" type="datetimeFigureOut">
               <a:rPr lang="en-US" smtClean="0"/>
-              <a:t>12/27/25</a:t>
+              <a:t>4/8/26</a:t>
             </a:fld>
             <a:endParaRPr lang="en-US"/>
           </a:p>
@@ -2392,7 +2477,7 @@
           <a:p>
             <a:fld id="{3FAC01E6-7D67-744B-A9B5-351F18CCB29F}" type="datetimeFigureOut">
               <a:rPr lang="en-US" smtClean="0"/>
-              <a:t>12/27/25</a:t>
+              <a:t>4/8/26</a:t>
             </a:fld>
             <a:endParaRPr lang="en-US"/>
           </a:p>
@@ -2505,7 +2590,7 @@
           <a:p>
             <a:fld id="{3FAC01E6-7D67-744B-A9B5-351F18CCB29F}" type="datetimeFigureOut">
               <a:rPr lang="en-US" smtClean="0"/>
-              <a:t>12/27/25</a:t>
+              <a:t>4/8/26</a:t>
             </a:fld>
             <a:endParaRPr lang="en-US"/>
           </a:p>
@@ -2816,7 +2901,7 @@
           <a:p>
             <a:fld id="{3FAC01E6-7D67-744B-A9B5-351F18CCB29F}" type="datetimeFigureOut">
               <a:rPr lang="en-US" smtClean="0"/>
-              <a:t>12/27/25</a:t>
+              <a:t>4/8/26</a:t>
             </a:fld>
             <a:endParaRPr lang="en-US"/>
           </a:p>
@@ -3104,7 +3189,7 @@
           <a:p>
             <a:fld id="{3FAC01E6-7D67-744B-A9B5-351F18CCB29F}" type="datetimeFigureOut">
               <a:rPr lang="en-US" smtClean="0"/>
-              <a:t>12/27/25</a:t>
+              <a:t>4/8/26</a:t>
             </a:fld>
             <a:endParaRPr lang="en-US"/>
           </a:p>
@@ -3345,7 +3430,7 @@
           <a:p>
             <a:fld id="{3FAC01E6-7D67-744B-A9B5-351F18CCB29F}" type="datetimeFigureOut">
               <a:rPr lang="en-US" smtClean="0"/>
-              <a:t>12/27/25</a:t>
+              <a:t>4/8/26</a:t>
             </a:fld>
             <a:endParaRPr lang="en-US"/>
           </a:p>
@@ -6547,6 +6632,1764 @@
   <p:clrMapOvr>
     <a:masterClrMapping/>
   </p:clrMapOvr>
+</p:sld>
+</file>
+
+<file path=ppt/slides/slide2.xml><?xml version="1.0" encoding="utf-8"?>
+<p:sld xmlns:a="http://schemas.openxmlformats.org/drawingml/2006/main" xmlns:r="http://schemas.openxmlformats.org/officeDocument/2006/relationships" xmlns:p="http://schemas.openxmlformats.org/presentationml/2006/main">
+  <p:cSld>
+    <p:spTree>
+      <p:nvGrpSpPr>
+        <p:cNvPr id="1" name=""/>
+        <p:cNvGrpSpPr/>
+        <p:nvPr/>
+      </p:nvGrpSpPr>
+      <p:grpSpPr>
+        <a:xfrm>
+          <a:off x="0" y="0"/>
+          <a:ext cx="0" cy="0"/>
+          <a:chOff x="0" y="0"/>
+          <a:chExt cx="0" cy="0"/>
+        </a:xfrm>
+      </p:grpSpPr>
+      <p:sp>
+        <p:nvSpPr>
+          <p:cNvPr id="5" name="Triangle 4">
+            <a:extLst>
+              <a:ext uri="{FF2B5EF4-FFF2-40B4-BE49-F238E27FC236}">
+                <a16:creationId xmlns:a16="http://schemas.microsoft.com/office/drawing/2014/main" id="{DF9B07DF-5765-9480-86CE-814CD9A0C6AB}"/>
+              </a:ext>
+            </a:extLst>
+          </p:cNvPr>
+          <p:cNvSpPr/>
+          <p:nvPr/>
+        </p:nvSpPr>
+        <p:spPr>
+          <a:xfrm>
+            <a:off x="332613" y="2091690"/>
+            <a:ext cx="1392174" cy="1257300"/>
+          </a:xfrm>
+          <a:prstGeom prst="triangle">
+            <a:avLst/>
+          </a:prstGeom>
+        </p:spPr>
+        <p:style>
+          <a:lnRef idx="2">
+            <a:schemeClr val="accent1">
+              <a:shade val="15000"/>
+            </a:schemeClr>
+          </a:lnRef>
+          <a:fillRef idx="1">
+            <a:schemeClr val="accent1"/>
+          </a:fillRef>
+          <a:effectRef idx="0">
+            <a:schemeClr val="accent1"/>
+          </a:effectRef>
+          <a:fontRef idx="minor">
+            <a:schemeClr val="lt1"/>
+          </a:fontRef>
+        </p:style>
+        <p:txBody>
+          <a:bodyPr rtlCol="0" anchor="ctr"/>
+          <a:lstStyle/>
+          <a:p>
+            <a:pPr algn="ctr"/>
+            <a:r>
+              <a:rPr lang="en-US" sz="1400" dirty="0" err="1"/>
+              <a:t>物料更新</a:t>
+            </a:r>
+            <a:endParaRPr lang="en-US" sz="1400" dirty="0"/>
+          </a:p>
+        </p:txBody>
+      </p:sp>
+      <p:sp>
+        <p:nvSpPr>
+          <p:cNvPr id="8" name="Smiley Face 7">
+            <a:extLst>
+              <a:ext uri="{FF2B5EF4-FFF2-40B4-BE49-F238E27FC236}">
+                <a16:creationId xmlns:a16="http://schemas.microsoft.com/office/drawing/2014/main" id="{9C8C1E7D-2C42-7803-A3FE-092BB6F9C2A1}"/>
+              </a:ext>
+            </a:extLst>
+          </p:cNvPr>
+          <p:cNvSpPr/>
+          <p:nvPr/>
+        </p:nvSpPr>
+        <p:spPr>
+          <a:xfrm>
+            <a:off x="7285818" y="1071710"/>
+            <a:ext cx="914400" cy="914400"/>
+          </a:xfrm>
+          <a:prstGeom prst="smileyFace">
+            <a:avLst/>
+          </a:prstGeom>
+        </p:spPr>
+        <p:style>
+          <a:lnRef idx="2">
+            <a:schemeClr val="accent1">
+              <a:shade val="15000"/>
+            </a:schemeClr>
+          </a:lnRef>
+          <a:fillRef idx="1">
+            <a:schemeClr val="accent1"/>
+          </a:fillRef>
+          <a:effectRef idx="0">
+            <a:schemeClr val="accent1"/>
+          </a:effectRef>
+          <a:fontRef idx="minor">
+            <a:schemeClr val="lt1"/>
+          </a:fontRef>
+        </p:style>
+        <p:txBody>
+          <a:bodyPr rtlCol="0" anchor="ctr"/>
+          <a:lstStyle/>
+          <a:p>
+            <a:pPr algn="ctr"/>
+            <a:endParaRPr lang="en-US"/>
+          </a:p>
+        </p:txBody>
+      </p:sp>
+      <p:sp>
+        <p:nvSpPr>
+          <p:cNvPr id="9" name="Smiley Face 8">
+            <a:extLst>
+              <a:ext uri="{FF2B5EF4-FFF2-40B4-BE49-F238E27FC236}">
+                <a16:creationId xmlns:a16="http://schemas.microsoft.com/office/drawing/2014/main" id="{E59234C5-FCB1-E721-C1E4-581B9EF61B9A}"/>
+              </a:ext>
+            </a:extLst>
+          </p:cNvPr>
+          <p:cNvSpPr/>
+          <p:nvPr/>
+        </p:nvSpPr>
+        <p:spPr>
+          <a:xfrm>
+            <a:off x="11112062" y="1134844"/>
+            <a:ext cx="914400" cy="914400"/>
+          </a:xfrm>
+          <a:prstGeom prst="smileyFace">
+            <a:avLst/>
+          </a:prstGeom>
+        </p:spPr>
+        <p:style>
+          <a:lnRef idx="2">
+            <a:schemeClr val="accent1">
+              <a:shade val="15000"/>
+            </a:schemeClr>
+          </a:lnRef>
+          <a:fillRef idx="1">
+            <a:schemeClr val="accent1"/>
+          </a:fillRef>
+          <a:effectRef idx="0">
+            <a:schemeClr val="accent1"/>
+          </a:effectRef>
+          <a:fontRef idx="minor">
+            <a:schemeClr val="lt1"/>
+          </a:fontRef>
+        </p:style>
+        <p:txBody>
+          <a:bodyPr rtlCol="0" anchor="ctr"/>
+          <a:lstStyle/>
+          <a:p>
+            <a:pPr algn="ctr"/>
+            <a:endParaRPr lang="en-US"/>
+          </a:p>
+        </p:txBody>
+      </p:sp>
+      <p:pic>
+        <p:nvPicPr>
+          <p:cNvPr id="10" name="Picture 9">
+            <a:extLst>
+              <a:ext uri="{FF2B5EF4-FFF2-40B4-BE49-F238E27FC236}">
+                <a16:creationId xmlns:a16="http://schemas.microsoft.com/office/drawing/2014/main" id="{96A74797-A720-A677-691B-2CB934E37839}"/>
+              </a:ext>
+            </a:extLst>
+          </p:cNvPr>
+          <p:cNvPicPr>
+            <a:picLocks noChangeAspect="1"/>
+          </p:cNvPicPr>
+          <p:nvPr/>
+        </p:nvPicPr>
+        <p:blipFill>
+          <a:blip r:embed="rId3"/>
+          <a:stretch>
+            <a:fillRect/>
+          </a:stretch>
+        </p:blipFill>
+        <p:spPr>
+          <a:xfrm>
+            <a:off x="3238310" y="1078230"/>
+            <a:ext cx="1013460" cy="1013460"/>
+          </a:xfrm>
+          <a:prstGeom prst="rect">
+            <a:avLst/>
+          </a:prstGeom>
+        </p:spPr>
+      </p:pic>
+      <p:sp>
+        <p:nvSpPr>
+          <p:cNvPr id="12" name="TextBox 11">
+            <a:extLst>
+              <a:ext uri="{FF2B5EF4-FFF2-40B4-BE49-F238E27FC236}">
+                <a16:creationId xmlns:a16="http://schemas.microsoft.com/office/drawing/2014/main" id="{3FC27392-2042-7636-5231-238931A8DFE7}"/>
+              </a:ext>
+            </a:extLst>
+          </p:cNvPr>
+          <p:cNvSpPr txBox="1"/>
+          <p:nvPr/>
+        </p:nvSpPr>
+        <p:spPr>
+          <a:xfrm>
+            <a:off x="3143631" y="683626"/>
+            <a:ext cx="1202817" cy="338554"/>
+          </a:xfrm>
+          <a:prstGeom prst="rect">
+            <a:avLst/>
+          </a:prstGeom>
+          <a:noFill/>
+        </p:spPr>
+        <p:txBody>
+          <a:bodyPr wrap="square">
+            <a:spAutoFit/>
+          </a:bodyPr>
+          <a:lstStyle/>
+          <a:p>
+            <a:r>
+              <a:rPr lang="en-US" sz="1600" dirty="0" err="1"/>
+              <a:t>物料智能体</a:t>
+            </a:r>
+            <a:endParaRPr lang="en-US" sz="1600" dirty="0"/>
+          </a:p>
+        </p:txBody>
+      </p:sp>
+      <p:pic>
+        <p:nvPicPr>
+          <p:cNvPr id="17" name="Picture 16">
+            <a:extLst>
+              <a:ext uri="{FF2B5EF4-FFF2-40B4-BE49-F238E27FC236}">
+                <a16:creationId xmlns:a16="http://schemas.microsoft.com/office/drawing/2014/main" id="{F0C831D2-66D6-7854-3762-8A3E1013C294}"/>
+              </a:ext>
+            </a:extLst>
+          </p:cNvPr>
+          <p:cNvPicPr>
+            <a:picLocks noChangeAspect="1"/>
+          </p:cNvPicPr>
+          <p:nvPr/>
+        </p:nvPicPr>
+        <p:blipFill>
+          <a:blip r:embed="rId3"/>
+          <a:stretch>
+            <a:fillRect/>
+          </a:stretch>
+        </p:blipFill>
+        <p:spPr>
+          <a:xfrm>
+            <a:off x="5330502" y="1078230"/>
+            <a:ext cx="1013460" cy="1013460"/>
+          </a:xfrm>
+          <a:prstGeom prst="rect">
+            <a:avLst/>
+          </a:prstGeom>
+        </p:spPr>
+      </p:pic>
+      <p:sp>
+        <p:nvSpPr>
+          <p:cNvPr id="18" name="TextBox 17">
+            <a:extLst>
+              <a:ext uri="{FF2B5EF4-FFF2-40B4-BE49-F238E27FC236}">
+                <a16:creationId xmlns:a16="http://schemas.microsoft.com/office/drawing/2014/main" id="{B08CE79C-4986-0747-9821-0CA53C11A611}"/>
+              </a:ext>
+            </a:extLst>
+          </p:cNvPr>
+          <p:cNvSpPr txBox="1"/>
+          <p:nvPr/>
+        </p:nvSpPr>
+        <p:spPr>
+          <a:xfrm>
+            <a:off x="5235824" y="697230"/>
+            <a:ext cx="1202817" cy="338554"/>
+          </a:xfrm>
+          <a:prstGeom prst="rect">
+            <a:avLst/>
+          </a:prstGeom>
+          <a:noFill/>
+        </p:spPr>
+        <p:txBody>
+          <a:bodyPr wrap="square">
+            <a:spAutoFit/>
+          </a:bodyPr>
+          <a:lstStyle/>
+          <a:p>
+            <a:r>
+              <a:rPr lang="en-US" sz="1600" dirty="0" err="1"/>
+              <a:t>订单智能体</a:t>
+            </a:r>
+            <a:endParaRPr lang="en-US" sz="1600" dirty="0"/>
+          </a:p>
+        </p:txBody>
+      </p:sp>
+      <p:pic>
+        <p:nvPicPr>
+          <p:cNvPr id="19" name="Picture 18">
+            <a:extLst>
+              <a:ext uri="{FF2B5EF4-FFF2-40B4-BE49-F238E27FC236}">
+                <a16:creationId xmlns:a16="http://schemas.microsoft.com/office/drawing/2014/main" id="{08AF50B1-79AF-E9B7-2BFB-C5ED1DF53905}"/>
+              </a:ext>
+            </a:extLst>
+          </p:cNvPr>
+          <p:cNvPicPr>
+            <a:picLocks noChangeAspect="1"/>
+          </p:cNvPicPr>
+          <p:nvPr/>
+        </p:nvPicPr>
+        <p:blipFill>
+          <a:blip r:embed="rId3"/>
+          <a:stretch>
+            <a:fillRect/>
+          </a:stretch>
+        </p:blipFill>
+        <p:spPr>
+          <a:xfrm>
+            <a:off x="9378010" y="1177290"/>
+            <a:ext cx="1013460" cy="1013460"/>
+          </a:xfrm>
+          <a:prstGeom prst="rect">
+            <a:avLst/>
+          </a:prstGeom>
+        </p:spPr>
+      </p:pic>
+      <p:sp>
+        <p:nvSpPr>
+          <p:cNvPr id="20" name="TextBox 19">
+            <a:extLst>
+              <a:ext uri="{FF2B5EF4-FFF2-40B4-BE49-F238E27FC236}">
+                <a16:creationId xmlns:a16="http://schemas.microsoft.com/office/drawing/2014/main" id="{B70B0A05-538B-17FC-64C3-645016366D3D}"/>
+              </a:ext>
+            </a:extLst>
+          </p:cNvPr>
+          <p:cNvSpPr txBox="1"/>
+          <p:nvPr/>
+        </p:nvSpPr>
+        <p:spPr>
+          <a:xfrm>
+            <a:off x="9283332" y="796290"/>
+            <a:ext cx="1202817" cy="338554"/>
+          </a:xfrm>
+          <a:prstGeom prst="rect">
+            <a:avLst/>
+          </a:prstGeom>
+          <a:noFill/>
+        </p:spPr>
+        <p:txBody>
+          <a:bodyPr wrap="square">
+            <a:spAutoFit/>
+          </a:bodyPr>
+          <a:lstStyle/>
+          <a:p>
+            <a:r>
+              <a:rPr lang="en-US" sz="1600" dirty="0" err="1"/>
+              <a:t>排程智能体</a:t>
+            </a:r>
+            <a:endParaRPr lang="en-US" sz="1600" dirty="0"/>
+          </a:p>
+        </p:txBody>
+      </p:sp>
+      <p:cxnSp>
+        <p:nvCxnSpPr>
+          <p:cNvPr id="22" name="Straight Connector 21">
+            <a:extLst>
+              <a:ext uri="{FF2B5EF4-FFF2-40B4-BE49-F238E27FC236}">
+                <a16:creationId xmlns:a16="http://schemas.microsoft.com/office/drawing/2014/main" id="{0EBB30D9-D148-7F52-4054-956380DF9077}"/>
+              </a:ext>
+            </a:extLst>
+          </p:cNvPr>
+          <p:cNvCxnSpPr>
+            <a:cxnSpLocks/>
+          </p:cNvCxnSpPr>
+          <p:nvPr/>
+        </p:nvCxnSpPr>
+        <p:spPr>
+          <a:xfrm>
+            <a:off x="3707275" y="2436865"/>
+            <a:ext cx="0" cy="4217158"/>
+          </a:xfrm>
+          <a:prstGeom prst="line">
+            <a:avLst/>
+          </a:prstGeom>
+        </p:spPr>
+        <p:style>
+          <a:lnRef idx="2">
+            <a:schemeClr val="accent1"/>
+          </a:lnRef>
+          <a:fillRef idx="0">
+            <a:schemeClr val="accent1"/>
+          </a:fillRef>
+          <a:effectRef idx="1">
+            <a:schemeClr val="accent1"/>
+          </a:effectRef>
+          <a:fontRef idx="minor">
+            <a:schemeClr val="tx1"/>
+          </a:fontRef>
+        </p:style>
+      </p:cxnSp>
+      <p:cxnSp>
+        <p:nvCxnSpPr>
+          <p:cNvPr id="25" name="Straight Connector 24">
+            <a:extLst>
+              <a:ext uri="{FF2B5EF4-FFF2-40B4-BE49-F238E27FC236}">
+                <a16:creationId xmlns:a16="http://schemas.microsoft.com/office/drawing/2014/main" id="{C0582BF1-EFB0-322C-13D2-4BDACFDB19CA}"/>
+              </a:ext>
+            </a:extLst>
+          </p:cNvPr>
+          <p:cNvCxnSpPr>
+            <a:cxnSpLocks/>
+          </p:cNvCxnSpPr>
+          <p:nvPr/>
+        </p:nvCxnSpPr>
+        <p:spPr>
+          <a:xfrm>
+            <a:off x="9910549" y="2456597"/>
+            <a:ext cx="0" cy="4217158"/>
+          </a:xfrm>
+          <a:prstGeom prst="line">
+            <a:avLst/>
+          </a:prstGeom>
+        </p:spPr>
+        <p:style>
+          <a:lnRef idx="2">
+            <a:schemeClr val="accent1"/>
+          </a:lnRef>
+          <a:fillRef idx="0">
+            <a:schemeClr val="accent1"/>
+          </a:fillRef>
+          <a:effectRef idx="1">
+            <a:schemeClr val="accent1"/>
+          </a:effectRef>
+          <a:fontRef idx="minor">
+            <a:schemeClr val="tx1"/>
+          </a:fontRef>
+        </p:style>
+      </p:cxnSp>
+      <p:cxnSp>
+        <p:nvCxnSpPr>
+          <p:cNvPr id="26" name="Straight Connector 25">
+            <a:extLst>
+              <a:ext uri="{FF2B5EF4-FFF2-40B4-BE49-F238E27FC236}">
+                <a16:creationId xmlns:a16="http://schemas.microsoft.com/office/drawing/2014/main" id="{0E5B9301-D55A-AEAD-1BD2-00AFCF8AE7E3}"/>
+              </a:ext>
+            </a:extLst>
+          </p:cNvPr>
+          <p:cNvCxnSpPr>
+            <a:cxnSpLocks/>
+          </p:cNvCxnSpPr>
+          <p:nvPr/>
+        </p:nvCxnSpPr>
+        <p:spPr>
+          <a:xfrm>
+            <a:off x="5752531" y="2456597"/>
+            <a:ext cx="0" cy="4217158"/>
+          </a:xfrm>
+          <a:prstGeom prst="line">
+            <a:avLst/>
+          </a:prstGeom>
+        </p:spPr>
+        <p:style>
+          <a:lnRef idx="2">
+            <a:schemeClr val="accent1"/>
+          </a:lnRef>
+          <a:fillRef idx="0">
+            <a:schemeClr val="accent1"/>
+          </a:fillRef>
+          <a:effectRef idx="1">
+            <a:schemeClr val="accent1"/>
+          </a:effectRef>
+          <a:fontRef idx="minor">
+            <a:schemeClr val="tx1"/>
+          </a:fontRef>
+        </p:style>
+      </p:cxnSp>
+      <p:cxnSp>
+        <p:nvCxnSpPr>
+          <p:cNvPr id="27" name="Straight Connector 26">
+            <a:extLst>
+              <a:ext uri="{FF2B5EF4-FFF2-40B4-BE49-F238E27FC236}">
+                <a16:creationId xmlns:a16="http://schemas.microsoft.com/office/drawing/2014/main" id="{01335DBF-2109-B00A-C64B-384834283D84}"/>
+              </a:ext>
+            </a:extLst>
+          </p:cNvPr>
+          <p:cNvCxnSpPr>
+            <a:cxnSpLocks/>
+          </p:cNvCxnSpPr>
+          <p:nvPr/>
+        </p:nvCxnSpPr>
+        <p:spPr>
+          <a:xfrm>
+            <a:off x="7676865" y="2456597"/>
+            <a:ext cx="0" cy="4217158"/>
+          </a:xfrm>
+          <a:prstGeom prst="line">
+            <a:avLst/>
+          </a:prstGeom>
+        </p:spPr>
+        <p:style>
+          <a:lnRef idx="2">
+            <a:schemeClr val="accent1"/>
+          </a:lnRef>
+          <a:fillRef idx="0">
+            <a:schemeClr val="accent1"/>
+          </a:fillRef>
+          <a:effectRef idx="1">
+            <a:schemeClr val="accent1"/>
+          </a:effectRef>
+          <a:fontRef idx="minor">
+            <a:schemeClr val="tx1"/>
+          </a:fontRef>
+        </p:style>
+      </p:cxnSp>
+      <p:cxnSp>
+        <p:nvCxnSpPr>
+          <p:cNvPr id="28" name="Straight Connector 27">
+            <a:extLst>
+              <a:ext uri="{FF2B5EF4-FFF2-40B4-BE49-F238E27FC236}">
+                <a16:creationId xmlns:a16="http://schemas.microsoft.com/office/drawing/2014/main" id="{F9E85AC2-8EB7-D16E-F918-4025F1E13B99}"/>
+              </a:ext>
+            </a:extLst>
+          </p:cNvPr>
+          <p:cNvCxnSpPr>
+            <a:cxnSpLocks/>
+          </p:cNvCxnSpPr>
+          <p:nvPr/>
+        </p:nvCxnSpPr>
+        <p:spPr>
+          <a:xfrm>
+            <a:off x="11684759" y="2436865"/>
+            <a:ext cx="0" cy="4217158"/>
+          </a:xfrm>
+          <a:prstGeom prst="line">
+            <a:avLst/>
+          </a:prstGeom>
+        </p:spPr>
+        <p:style>
+          <a:lnRef idx="2">
+            <a:schemeClr val="accent1"/>
+          </a:lnRef>
+          <a:fillRef idx="0">
+            <a:schemeClr val="accent1"/>
+          </a:fillRef>
+          <a:effectRef idx="1">
+            <a:schemeClr val="accent1"/>
+          </a:effectRef>
+          <a:fontRef idx="minor">
+            <a:schemeClr val="tx1"/>
+          </a:fontRef>
+        </p:style>
+      </p:cxnSp>
+      <p:cxnSp>
+        <p:nvCxnSpPr>
+          <p:cNvPr id="30" name="Straight Arrow Connector 29">
+            <a:extLst>
+              <a:ext uri="{FF2B5EF4-FFF2-40B4-BE49-F238E27FC236}">
+                <a16:creationId xmlns:a16="http://schemas.microsoft.com/office/drawing/2014/main" id="{4AB6D17E-3B54-5B2A-A3C9-0DC91BCDD66F}"/>
+              </a:ext>
+            </a:extLst>
+          </p:cNvPr>
+          <p:cNvCxnSpPr/>
+          <p:nvPr/>
+        </p:nvCxnSpPr>
+        <p:spPr>
+          <a:xfrm>
+            <a:off x="1883391" y="2934269"/>
+            <a:ext cx="1828800" cy="0"/>
+          </a:xfrm>
+          <a:prstGeom prst="straightConnector1">
+            <a:avLst/>
+          </a:prstGeom>
+          <a:ln>
+            <a:tailEnd type="triangle"/>
+          </a:ln>
+        </p:spPr>
+        <p:style>
+          <a:lnRef idx="2">
+            <a:schemeClr val="accent1"/>
+          </a:lnRef>
+          <a:fillRef idx="0">
+            <a:schemeClr val="accent1"/>
+          </a:fillRef>
+          <a:effectRef idx="1">
+            <a:schemeClr val="accent1"/>
+          </a:effectRef>
+          <a:fontRef idx="minor">
+            <a:schemeClr val="tx1"/>
+          </a:fontRef>
+        </p:style>
+      </p:cxnSp>
+      <p:cxnSp>
+        <p:nvCxnSpPr>
+          <p:cNvPr id="31" name="Straight Arrow Connector 30">
+            <a:extLst>
+              <a:ext uri="{FF2B5EF4-FFF2-40B4-BE49-F238E27FC236}">
+                <a16:creationId xmlns:a16="http://schemas.microsoft.com/office/drawing/2014/main" id="{7A52D710-52FB-77F8-91FD-3B4498DF0E55}"/>
+              </a:ext>
+            </a:extLst>
+          </p:cNvPr>
+          <p:cNvCxnSpPr>
+            <a:cxnSpLocks/>
+          </p:cNvCxnSpPr>
+          <p:nvPr/>
+        </p:nvCxnSpPr>
+        <p:spPr>
+          <a:xfrm>
+            <a:off x="3707275" y="3570589"/>
+            <a:ext cx="2040340" cy="0"/>
+          </a:xfrm>
+          <a:prstGeom prst="straightConnector1">
+            <a:avLst/>
+          </a:prstGeom>
+          <a:ln>
+            <a:tailEnd type="triangle"/>
+          </a:ln>
+        </p:spPr>
+        <p:style>
+          <a:lnRef idx="2">
+            <a:schemeClr val="accent1"/>
+          </a:lnRef>
+          <a:fillRef idx="0">
+            <a:schemeClr val="accent1"/>
+          </a:fillRef>
+          <a:effectRef idx="1">
+            <a:schemeClr val="accent1"/>
+          </a:effectRef>
+          <a:fontRef idx="minor">
+            <a:schemeClr val="tx1"/>
+          </a:fontRef>
+        </p:style>
+      </p:cxnSp>
+      <p:cxnSp>
+        <p:nvCxnSpPr>
+          <p:cNvPr id="33" name="Straight Arrow Connector 32">
+            <a:extLst>
+              <a:ext uri="{FF2B5EF4-FFF2-40B4-BE49-F238E27FC236}">
+                <a16:creationId xmlns:a16="http://schemas.microsoft.com/office/drawing/2014/main" id="{71B39D30-2832-108A-A714-625EE6040D6B}"/>
+              </a:ext>
+            </a:extLst>
+          </p:cNvPr>
+          <p:cNvCxnSpPr>
+            <a:cxnSpLocks/>
+          </p:cNvCxnSpPr>
+          <p:nvPr/>
+        </p:nvCxnSpPr>
+        <p:spPr>
+          <a:xfrm>
+            <a:off x="5747615" y="4061782"/>
+            <a:ext cx="1970964" cy="0"/>
+          </a:xfrm>
+          <a:prstGeom prst="straightConnector1">
+            <a:avLst/>
+          </a:prstGeom>
+          <a:ln>
+            <a:prstDash val="sysDot"/>
+            <a:tailEnd type="triangle"/>
+          </a:ln>
+        </p:spPr>
+        <p:style>
+          <a:lnRef idx="2">
+            <a:schemeClr val="accent1"/>
+          </a:lnRef>
+          <a:fillRef idx="0">
+            <a:schemeClr val="accent1"/>
+          </a:fillRef>
+          <a:effectRef idx="1">
+            <a:schemeClr val="accent1"/>
+          </a:effectRef>
+          <a:fontRef idx="minor">
+            <a:schemeClr val="tx1"/>
+          </a:fontRef>
+        </p:style>
+      </p:cxnSp>
+      <p:cxnSp>
+        <p:nvCxnSpPr>
+          <p:cNvPr id="35" name="Straight Arrow Connector 34">
+            <a:extLst>
+              <a:ext uri="{FF2B5EF4-FFF2-40B4-BE49-F238E27FC236}">
+                <a16:creationId xmlns:a16="http://schemas.microsoft.com/office/drawing/2014/main" id="{12BE0FFE-96B4-E826-21DD-E7034264B3D4}"/>
+              </a:ext>
+            </a:extLst>
+          </p:cNvPr>
+          <p:cNvCxnSpPr>
+            <a:cxnSpLocks/>
+          </p:cNvCxnSpPr>
+          <p:nvPr/>
+        </p:nvCxnSpPr>
+        <p:spPr>
+          <a:xfrm flipH="1">
+            <a:off x="5747615" y="4350880"/>
+            <a:ext cx="1929250" cy="0"/>
+          </a:xfrm>
+          <a:prstGeom prst="straightConnector1">
+            <a:avLst/>
+          </a:prstGeom>
+          <a:ln>
+            <a:prstDash val="sysDot"/>
+            <a:tailEnd type="triangle"/>
+          </a:ln>
+        </p:spPr>
+        <p:style>
+          <a:lnRef idx="2">
+            <a:schemeClr val="accent1"/>
+          </a:lnRef>
+          <a:fillRef idx="0">
+            <a:schemeClr val="accent1"/>
+          </a:fillRef>
+          <a:effectRef idx="1">
+            <a:schemeClr val="accent1"/>
+          </a:effectRef>
+          <a:fontRef idx="minor">
+            <a:schemeClr val="tx1"/>
+          </a:fontRef>
+        </p:style>
+      </p:cxnSp>
+      <p:cxnSp>
+        <p:nvCxnSpPr>
+          <p:cNvPr id="37" name="Straight Arrow Connector 36">
+            <a:extLst>
+              <a:ext uri="{FF2B5EF4-FFF2-40B4-BE49-F238E27FC236}">
+                <a16:creationId xmlns:a16="http://schemas.microsoft.com/office/drawing/2014/main" id="{ABF65D7A-7A09-C667-B71E-6EBBAB4E1FEB}"/>
+              </a:ext>
+            </a:extLst>
+          </p:cNvPr>
+          <p:cNvCxnSpPr>
+            <a:cxnSpLocks/>
+          </p:cNvCxnSpPr>
+          <p:nvPr/>
+        </p:nvCxnSpPr>
+        <p:spPr>
+          <a:xfrm>
+            <a:off x="3707275" y="5384781"/>
+            <a:ext cx="6198358" cy="0"/>
+          </a:xfrm>
+          <a:prstGeom prst="straightConnector1">
+            <a:avLst/>
+          </a:prstGeom>
+          <a:ln>
+            <a:tailEnd type="triangle"/>
+          </a:ln>
+        </p:spPr>
+        <p:style>
+          <a:lnRef idx="2">
+            <a:schemeClr val="accent1"/>
+          </a:lnRef>
+          <a:fillRef idx="0">
+            <a:schemeClr val="accent1"/>
+          </a:fillRef>
+          <a:effectRef idx="1">
+            <a:schemeClr val="accent1"/>
+          </a:effectRef>
+          <a:fontRef idx="minor">
+            <a:schemeClr val="tx1"/>
+          </a:fontRef>
+        </p:style>
+      </p:cxnSp>
+      <p:cxnSp>
+        <p:nvCxnSpPr>
+          <p:cNvPr id="39" name="Straight Arrow Connector 38">
+            <a:extLst>
+              <a:ext uri="{FF2B5EF4-FFF2-40B4-BE49-F238E27FC236}">
+                <a16:creationId xmlns:a16="http://schemas.microsoft.com/office/drawing/2014/main" id="{A4EB7AB3-9042-EE24-2D75-1455CC9A6F6F}"/>
+              </a:ext>
+            </a:extLst>
+          </p:cNvPr>
+          <p:cNvCxnSpPr>
+            <a:cxnSpLocks/>
+          </p:cNvCxnSpPr>
+          <p:nvPr/>
+        </p:nvCxnSpPr>
+        <p:spPr>
+          <a:xfrm flipH="1">
+            <a:off x="3707275" y="6478877"/>
+            <a:ext cx="6198358" cy="0"/>
+          </a:xfrm>
+          <a:prstGeom prst="straightConnector1">
+            <a:avLst/>
+          </a:prstGeom>
+          <a:ln>
+            <a:tailEnd type="triangle"/>
+          </a:ln>
+        </p:spPr>
+        <p:style>
+          <a:lnRef idx="2">
+            <a:schemeClr val="accent1"/>
+          </a:lnRef>
+          <a:fillRef idx="0">
+            <a:schemeClr val="accent1"/>
+          </a:fillRef>
+          <a:effectRef idx="1">
+            <a:schemeClr val="accent1"/>
+          </a:effectRef>
+          <a:fontRef idx="minor">
+            <a:schemeClr val="tx1"/>
+          </a:fontRef>
+        </p:style>
+      </p:cxnSp>
+      <p:cxnSp>
+        <p:nvCxnSpPr>
+          <p:cNvPr id="41" name="Straight Arrow Connector 40">
+            <a:extLst>
+              <a:ext uri="{FF2B5EF4-FFF2-40B4-BE49-F238E27FC236}">
+                <a16:creationId xmlns:a16="http://schemas.microsoft.com/office/drawing/2014/main" id="{39F23CD9-8BD8-7F70-361C-A50D823CA067}"/>
+              </a:ext>
+            </a:extLst>
+          </p:cNvPr>
+          <p:cNvCxnSpPr>
+            <a:cxnSpLocks/>
+          </p:cNvCxnSpPr>
+          <p:nvPr/>
+        </p:nvCxnSpPr>
+        <p:spPr>
+          <a:xfrm flipH="1">
+            <a:off x="3707275" y="4691020"/>
+            <a:ext cx="2040340" cy="0"/>
+          </a:xfrm>
+          <a:prstGeom prst="straightConnector1">
+            <a:avLst/>
+          </a:prstGeom>
+          <a:ln>
+            <a:tailEnd type="triangle"/>
+          </a:ln>
+        </p:spPr>
+        <p:style>
+          <a:lnRef idx="2">
+            <a:schemeClr val="accent1"/>
+          </a:lnRef>
+          <a:fillRef idx="0">
+            <a:schemeClr val="accent1"/>
+          </a:fillRef>
+          <a:effectRef idx="1">
+            <a:schemeClr val="accent1"/>
+          </a:effectRef>
+          <a:fontRef idx="minor">
+            <a:schemeClr val="tx1"/>
+          </a:fontRef>
+        </p:style>
+      </p:cxnSp>
+      <p:cxnSp>
+        <p:nvCxnSpPr>
+          <p:cNvPr id="46" name="Straight Arrow Connector 45">
+            <a:extLst>
+              <a:ext uri="{FF2B5EF4-FFF2-40B4-BE49-F238E27FC236}">
+                <a16:creationId xmlns:a16="http://schemas.microsoft.com/office/drawing/2014/main" id="{309D9437-669D-1BF5-B00D-27DD60F48673}"/>
+              </a:ext>
+            </a:extLst>
+          </p:cNvPr>
+          <p:cNvCxnSpPr>
+            <a:cxnSpLocks/>
+          </p:cNvCxnSpPr>
+          <p:nvPr/>
+        </p:nvCxnSpPr>
+        <p:spPr>
+          <a:xfrm>
+            <a:off x="9877884" y="6033414"/>
+            <a:ext cx="1779126" cy="0"/>
+          </a:xfrm>
+          <a:prstGeom prst="straightConnector1">
+            <a:avLst/>
+          </a:prstGeom>
+          <a:ln>
+            <a:prstDash val="sysDot"/>
+            <a:tailEnd type="triangle"/>
+          </a:ln>
+        </p:spPr>
+        <p:style>
+          <a:lnRef idx="2">
+            <a:schemeClr val="accent1"/>
+          </a:lnRef>
+          <a:fillRef idx="0">
+            <a:schemeClr val="accent1"/>
+          </a:fillRef>
+          <a:effectRef idx="1">
+            <a:schemeClr val="accent1"/>
+          </a:effectRef>
+          <a:fontRef idx="minor">
+            <a:schemeClr val="tx1"/>
+          </a:fontRef>
+        </p:style>
+      </p:cxnSp>
+      <p:cxnSp>
+        <p:nvCxnSpPr>
+          <p:cNvPr id="47" name="Straight Arrow Connector 46">
+            <a:extLst>
+              <a:ext uri="{FF2B5EF4-FFF2-40B4-BE49-F238E27FC236}">
+                <a16:creationId xmlns:a16="http://schemas.microsoft.com/office/drawing/2014/main" id="{6A2AA2EA-04CD-7749-4D1A-B6FFD6B8C614}"/>
+              </a:ext>
+            </a:extLst>
+          </p:cNvPr>
+          <p:cNvCxnSpPr>
+            <a:cxnSpLocks/>
+          </p:cNvCxnSpPr>
+          <p:nvPr/>
+        </p:nvCxnSpPr>
+        <p:spPr>
+          <a:xfrm flipH="1">
+            <a:off x="9877884" y="6320015"/>
+            <a:ext cx="1779126" cy="0"/>
+          </a:xfrm>
+          <a:prstGeom prst="straightConnector1">
+            <a:avLst/>
+          </a:prstGeom>
+          <a:ln>
+            <a:prstDash val="sysDot"/>
+            <a:tailEnd type="triangle"/>
+          </a:ln>
+        </p:spPr>
+        <p:style>
+          <a:lnRef idx="2">
+            <a:schemeClr val="accent1"/>
+          </a:lnRef>
+          <a:fillRef idx="0">
+            <a:schemeClr val="accent1"/>
+          </a:fillRef>
+          <a:effectRef idx="1">
+            <a:schemeClr val="accent1"/>
+          </a:effectRef>
+          <a:fontRef idx="minor">
+            <a:schemeClr val="tx1"/>
+          </a:fontRef>
+        </p:style>
+      </p:cxnSp>
+      <p:sp>
+        <p:nvSpPr>
+          <p:cNvPr id="52" name="TextBox 51">
+            <a:extLst>
+              <a:ext uri="{FF2B5EF4-FFF2-40B4-BE49-F238E27FC236}">
+                <a16:creationId xmlns:a16="http://schemas.microsoft.com/office/drawing/2014/main" id="{14ED2F7C-7B4B-E010-2703-7A4D4F4E49A6}"/>
+              </a:ext>
+            </a:extLst>
+          </p:cNvPr>
+          <p:cNvSpPr txBox="1"/>
+          <p:nvPr/>
+        </p:nvSpPr>
+        <p:spPr>
+          <a:xfrm>
+            <a:off x="5864106" y="4016472"/>
+            <a:ext cx="1662635" cy="369332"/>
+          </a:xfrm>
+          <a:prstGeom prst="rect">
+            <a:avLst/>
+          </a:prstGeom>
+          <a:noFill/>
+        </p:spPr>
+        <p:txBody>
+          <a:bodyPr wrap="none" rtlCol="0">
+            <a:spAutoFit/>
+          </a:bodyPr>
+          <a:lstStyle/>
+          <a:p>
+            <a:r>
+              <a:rPr lang="en-US" dirty="0"/>
+              <a:t>If Impact HIGH</a:t>
+            </a:r>
+          </a:p>
+        </p:txBody>
+      </p:sp>
+      <p:sp>
+        <p:nvSpPr>
+          <p:cNvPr id="53" name="TextBox 52">
+            <a:extLst>
+              <a:ext uri="{FF2B5EF4-FFF2-40B4-BE49-F238E27FC236}">
+                <a16:creationId xmlns:a16="http://schemas.microsoft.com/office/drawing/2014/main" id="{43131ACA-0F48-A23C-1ACD-E19AC4AFA88A}"/>
+              </a:ext>
+            </a:extLst>
+          </p:cNvPr>
+          <p:cNvSpPr txBox="1"/>
+          <p:nvPr/>
+        </p:nvSpPr>
+        <p:spPr>
+          <a:xfrm>
+            <a:off x="9905633" y="6016779"/>
+            <a:ext cx="1662635" cy="369332"/>
+          </a:xfrm>
+          <a:prstGeom prst="rect">
+            <a:avLst/>
+          </a:prstGeom>
+          <a:noFill/>
+        </p:spPr>
+        <p:txBody>
+          <a:bodyPr wrap="none" rtlCol="0">
+            <a:spAutoFit/>
+          </a:bodyPr>
+          <a:lstStyle/>
+          <a:p>
+            <a:r>
+              <a:rPr lang="en-US" dirty="0"/>
+              <a:t>If Impact HIGH</a:t>
+            </a:r>
+          </a:p>
+        </p:txBody>
+      </p:sp>
+      <p:sp>
+        <p:nvSpPr>
+          <p:cNvPr id="54" name="Curved Left Arrow 53">
+            <a:extLst>
+              <a:ext uri="{FF2B5EF4-FFF2-40B4-BE49-F238E27FC236}">
+                <a16:creationId xmlns:a16="http://schemas.microsoft.com/office/drawing/2014/main" id="{1048C0AE-34F1-47F4-D425-C79277FE37F6}"/>
+              </a:ext>
+            </a:extLst>
+          </p:cNvPr>
+          <p:cNvSpPr/>
+          <p:nvPr/>
+        </p:nvSpPr>
+        <p:spPr>
+          <a:xfrm>
+            <a:off x="5747615" y="3679857"/>
+            <a:ext cx="223007" cy="330884"/>
+          </a:xfrm>
+          <a:prstGeom prst="curvedLeftArrow">
+            <a:avLst>
+              <a:gd name="adj1" fmla="val 25000"/>
+              <a:gd name="adj2" fmla="val 50000"/>
+              <a:gd name="adj3" fmla="val 26524"/>
+            </a:avLst>
+          </a:prstGeom>
+        </p:spPr>
+        <p:style>
+          <a:lnRef idx="2">
+            <a:schemeClr val="accent1">
+              <a:shade val="15000"/>
+            </a:schemeClr>
+          </a:lnRef>
+          <a:fillRef idx="1">
+            <a:schemeClr val="accent1"/>
+          </a:fillRef>
+          <a:effectRef idx="0">
+            <a:schemeClr val="accent1"/>
+          </a:effectRef>
+          <a:fontRef idx="minor">
+            <a:schemeClr val="lt1"/>
+          </a:fontRef>
+        </p:style>
+        <p:txBody>
+          <a:bodyPr rtlCol="0" anchor="ctr"/>
+          <a:lstStyle/>
+          <a:p>
+            <a:pPr algn="ctr"/>
+            <a:endParaRPr lang="en-US">
+              <a:solidFill>
+                <a:schemeClr val="tx1"/>
+              </a:solidFill>
+            </a:endParaRPr>
+          </a:p>
+        </p:txBody>
+      </p:sp>
+      <p:sp>
+        <p:nvSpPr>
+          <p:cNvPr id="55" name="Curved Left Arrow 54">
+            <a:extLst>
+              <a:ext uri="{FF2B5EF4-FFF2-40B4-BE49-F238E27FC236}">
+                <a16:creationId xmlns:a16="http://schemas.microsoft.com/office/drawing/2014/main" id="{094A4752-BDFC-F080-94C2-AC96B2FAA821}"/>
+              </a:ext>
+            </a:extLst>
+          </p:cNvPr>
+          <p:cNvSpPr/>
+          <p:nvPr/>
+        </p:nvSpPr>
+        <p:spPr>
+          <a:xfrm>
+            <a:off x="9938299" y="5593129"/>
+            <a:ext cx="223007" cy="330884"/>
+          </a:xfrm>
+          <a:prstGeom prst="curvedLeftArrow">
+            <a:avLst>
+              <a:gd name="adj1" fmla="val 25000"/>
+              <a:gd name="adj2" fmla="val 50000"/>
+              <a:gd name="adj3" fmla="val 26524"/>
+            </a:avLst>
+          </a:prstGeom>
+        </p:spPr>
+        <p:style>
+          <a:lnRef idx="2">
+            <a:schemeClr val="accent1">
+              <a:shade val="15000"/>
+            </a:schemeClr>
+          </a:lnRef>
+          <a:fillRef idx="1">
+            <a:schemeClr val="accent1"/>
+          </a:fillRef>
+          <a:effectRef idx="0">
+            <a:schemeClr val="accent1"/>
+          </a:effectRef>
+          <a:fontRef idx="minor">
+            <a:schemeClr val="lt1"/>
+          </a:fontRef>
+        </p:style>
+        <p:txBody>
+          <a:bodyPr rtlCol="0" anchor="ctr"/>
+          <a:lstStyle/>
+          <a:p>
+            <a:pPr algn="ctr"/>
+            <a:endParaRPr lang="en-US">
+              <a:solidFill>
+                <a:schemeClr val="tx1"/>
+              </a:solidFill>
+            </a:endParaRPr>
+          </a:p>
+        </p:txBody>
+      </p:sp>
+      <p:sp>
+        <p:nvSpPr>
+          <p:cNvPr id="56" name="Curved Left Arrow 55">
+            <a:extLst>
+              <a:ext uri="{FF2B5EF4-FFF2-40B4-BE49-F238E27FC236}">
+                <a16:creationId xmlns:a16="http://schemas.microsoft.com/office/drawing/2014/main" id="{548463C1-54CB-EC01-AC91-0C46407A87BA}"/>
+              </a:ext>
+            </a:extLst>
+          </p:cNvPr>
+          <p:cNvSpPr/>
+          <p:nvPr/>
+        </p:nvSpPr>
+        <p:spPr>
+          <a:xfrm>
+            <a:off x="3719625" y="3040240"/>
+            <a:ext cx="223007" cy="330884"/>
+          </a:xfrm>
+          <a:prstGeom prst="curvedLeftArrow">
+            <a:avLst>
+              <a:gd name="adj1" fmla="val 25000"/>
+              <a:gd name="adj2" fmla="val 50000"/>
+              <a:gd name="adj3" fmla="val 26524"/>
+            </a:avLst>
+          </a:prstGeom>
+        </p:spPr>
+        <p:style>
+          <a:lnRef idx="2">
+            <a:schemeClr val="accent1">
+              <a:shade val="15000"/>
+            </a:schemeClr>
+          </a:lnRef>
+          <a:fillRef idx="1">
+            <a:schemeClr val="accent1"/>
+          </a:fillRef>
+          <a:effectRef idx="0">
+            <a:schemeClr val="accent1"/>
+          </a:effectRef>
+          <a:fontRef idx="minor">
+            <a:schemeClr val="lt1"/>
+          </a:fontRef>
+        </p:style>
+        <p:txBody>
+          <a:bodyPr rtlCol="0" anchor="ctr"/>
+          <a:lstStyle/>
+          <a:p>
+            <a:pPr algn="ctr"/>
+            <a:endParaRPr lang="en-US">
+              <a:solidFill>
+                <a:schemeClr val="tx1"/>
+              </a:solidFill>
+            </a:endParaRPr>
+          </a:p>
+        </p:txBody>
+      </p:sp>
+    </p:spTree>
+    <p:extLst>
+      <p:ext uri="{BB962C8B-B14F-4D97-AF65-F5344CB8AC3E}">
+        <p14:creationId xmlns:p14="http://schemas.microsoft.com/office/powerpoint/2010/main" val="1013517892"/>
+      </p:ext>
+    </p:extLst>
+  </p:cSld>
+  <p:clrMapOvr>
+    <a:masterClrMapping/>
+  </p:clrMapOvr>
+  <p:timing>
+    <p:tnLst>
+      <p:par>
+        <p:cTn id="1" dur="indefinite" restart="never" nodeType="tmRoot">
+          <p:childTnLst>
+            <p:seq concurrent="1" nextAc="seek">
+              <p:cTn id="2" dur="indefinite" nodeType="mainSeq">
+                <p:childTnLst>
+                  <p:par>
+                    <p:cTn id="3" fill="hold">
+                      <p:stCondLst>
+                        <p:cond delay="indefinite"/>
+                      </p:stCondLst>
+                      <p:childTnLst>
+                        <p:par>
+                          <p:cTn id="4" fill="hold">
+                            <p:stCondLst>
+                              <p:cond delay="0"/>
+                            </p:stCondLst>
+                            <p:childTnLst>
+                              <p:par>
+                                <p:cTn id="5" presetID="1" presetClass="entr" presetSubtype="0" fill="hold" nodeType="clickEffect">
+                                  <p:stCondLst>
+                                    <p:cond delay="0"/>
+                                  </p:stCondLst>
+                                  <p:childTnLst>
+                                    <p:set>
+                                      <p:cBhvr>
+                                        <p:cTn id="6" dur="1" fill="hold">
+                                          <p:stCondLst>
+                                            <p:cond delay="0"/>
+                                          </p:stCondLst>
+                                        </p:cTn>
+                                        <p:tgtEl>
+                                          <p:spTgt spid="30"/>
+                                        </p:tgtEl>
+                                        <p:attrNameLst>
+                                          <p:attrName>style.visibility</p:attrName>
+                                        </p:attrNameLst>
+                                      </p:cBhvr>
+                                      <p:to>
+                                        <p:strVal val="visible"/>
+                                      </p:to>
+                                    </p:set>
+                                  </p:childTnLst>
+                                </p:cTn>
+                              </p:par>
+                            </p:childTnLst>
+                          </p:cTn>
+                        </p:par>
+                      </p:childTnLst>
+                    </p:cTn>
+                  </p:par>
+                  <p:par>
+                    <p:cTn id="7" fill="hold">
+                      <p:stCondLst>
+                        <p:cond delay="indefinite"/>
+                      </p:stCondLst>
+                      <p:childTnLst>
+                        <p:par>
+                          <p:cTn id="8" fill="hold">
+                            <p:stCondLst>
+                              <p:cond delay="0"/>
+                            </p:stCondLst>
+                            <p:childTnLst>
+                              <p:par>
+                                <p:cTn id="9" presetID="1" presetClass="entr" presetSubtype="0" fill="hold" grpId="0" nodeType="clickEffect">
+                                  <p:stCondLst>
+                                    <p:cond delay="0"/>
+                                  </p:stCondLst>
+                                  <p:childTnLst>
+                                    <p:set>
+                                      <p:cBhvr>
+                                        <p:cTn id="10" dur="1" fill="hold">
+                                          <p:stCondLst>
+                                            <p:cond delay="0"/>
+                                          </p:stCondLst>
+                                        </p:cTn>
+                                        <p:tgtEl>
+                                          <p:spTgt spid="56"/>
+                                        </p:tgtEl>
+                                        <p:attrNameLst>
+                                          <p:attrName>style.visibility</p:attrName>
+                                        </p:attrNameLst>
+                                      </p:cBhvr>
+                                      <p:to>
+                                        <p:strVal val="visible"/>
+                                      </p:to>
+                                    </p:set>
+                                  </p:childTnLst>
+                                </p:cTn>
+                              </p:par>
+                            </p:childTnLst>
+                          </p:cTn>
+                        </p:par>
+                      </p:childTnLst>
+                    </p:cTn>
+                  </p:par>
+                  <p:par>
+                    <p:cTn id="11" fill="hold">
+                      <p:stCondLst>
+                        <p:cond delay="indefinite"/>
+                      </p:stCondLst>
+                      <p:childTnLst>
+                        <p:par>
+                          <p:cTn id="12" fill="hold">
+                            <p:stCondLst>
+                              <p:cond delay="0"/>
+                            </p:stCondLst>
+                            <p:childTnLst>
+                              <p:par>
+                                <p:cTn id="13" presetID="1" presetClass="entr" presetSubtype="0" fill="hold" nodeType="clickEffect">
+                                  <p:stCondLst>
+                                    <p:cond delay="0"/>
+                                  </p:stCondLst>
+                                  <p:childTnLst>
+                                    <p:set>
+                                      <p:cBhvr>
+                                        <p:cTn id="14" dur="1" fill="hold">
+                                          <p:stCondLst>
+                                            <p:cond delay="0"/>
+                                          </p:stCondLst>
+                                        </p:cTn>
+                                        <p:tgtEl>
+                                          <p:spTgt spid="31"/>
+                                        </p:tgtEl>
+                                        <p:attrNameLst>
+                                          <p:attrName>style.visibility</p:attrName>
+                                        </p:attrNameLst>
+                                      </p:cBhvr>
+                                      <p:to>
+                                        <p:strVal val="visible"/>
+                                      </p:to>
+                                    </p:set>
+                                  </p:childTnLst>
+                                </p:cTn>
+                              </p:par>
+                            </p:childTnLst>
+                          </p:cTn>
+                        </p:par>
+                      </p:childTnLst>
+                    </p:cTn>
+                  </p:par>
+                  <p:par>
+                    <p:cTn id="15" fill="hold">
+                      <p:stCondLst>
+                        <p:cond delay="indefinite"/>
+                      </p:stCondLst>
+                      <p:childTnLst>
+                        <p:par>
+                          <p:cTn id="16" fill="hold">
+                            <p:stCondLst>
+                              <p:cond delay="0"/>
+                            </p:stCondLst>
+                            <p:childTnLst>
+                              <p:par>
+                                <p:cTn id="17" presetID="1" presetClass="entr" presetSubtype="0" fill="hold" grpId="0" nodeType="clickEffect">
+                                  <p:stCondLst>
+                                    <p:cond delay="0"/>
+                                  </p:stCondLst>
+                                  <p:childTnLst>
+                                    <p:set>
+                                      <p:cBhvr>
+                                        <p:cTn id="18" dur="1" fill="hold">
+                                          <p:stCondLst>
+                                            <p:cond delay="0"/>
+                                          </p:stCondLst>
+                                        </p:cTn>
+                                        <p:tgtEl>
+                                          <p:spTgt spid="54"/>
+                                        </p:tgtEl>
+                                        <p:attrNameLst>
+                                          <p:attrName>style.visibility</p:attrName>
+                                        </p:attrNameLst>
+                                      </p:cBhvr>
+                                      <p:to>
+                                        <p:strVal val="visible"/>
+                                      </p:to>
+                                    </p:set>
+                                  </p:childTnLst>
+                                </p:cTn>
+                              </p:par>
+                            </p:childTnLst>
+                          </p:cTn>
+                        </p:par>
+                      </p:childTnLst>
+                    </p:cTn>
+                  </p:par>
+                  <p:par>
+                    <p:cTn id="19" fill="hold">
+                      <p:stCondLst>
+                        <p:cond delay="indefinite"/>
+                      </p:stCondLst>
+                      <p:childTnLst>
+                        <p:par>
+                          <p:cTn id="20" fill="hold">
+                            <p:stCondLst>
+                              <p:cond delay="0"/>
+                            </p:stCondLst>
+                            <p:childTnLst>
+                              <p:par>
+                                <p:cTn id="21" presetID="1" presetClass="entr" presetSubtype="0" fill="hold" nodeType="clickEffect">
+                                  <p:stCondLst>
+                                    <p:cond delay="0"/>
+                                  </p:stCondLst>
+                                  <p:childTnLst>
+                                    <p:set>
+                                      <p:cBhvr>
+                                        <p:cTn id="22" dur="1" fill="hold">
+                                          <p:stCondLst>
+                                            <p:cond delay="0"/>
+                                          </p:stCondLst>
+                                        </p:cTn>
+                                        <p:tgtEl>
+                                          <p:spTgt spid="33"/>
+                                        </p:tgtEl>
+                                        <p:attrNameLst>
+                                          <p:attrName>style.visibility</p:attrName>
+                                        </p:attrNameLst>
+                                      </p:cBhvr>
+                                      <p:to>
+                                        <p:strVal val="visible"/>
+                                      </p:to>
+                                    </p:set>
+                                  </p:childTnLst>
+                                </p:cTn>
+                              </p:par>
+                              <p:par>
+                                <p:cTn id="23" presetID="1" presetClass="entr" presetSubtype="0" fill="hold" nodeType="withEffect">
+                                  <p:stCondLst>
+                                    <p:cond delay="0"/>
+                                  </p:stCondLst>
+                                  <p:childTnLst>
+                                    <p:set>
+                                      <p:cBhvr>
+                                        <p:cTn id="24" dur="1" fill="hold">
+                                          <p:stCondLst>
+                                            <p:cond delay="0"/>
+                                          </p:stCondLst>
+                                        </p:cTn>
+                                        <p:tgtEl>
+                                          <p:spTgt spid="35"/>
+                                        </p:tgtEl>
+                                        <p:attrNameLst>
+                                          <p:attrName>style.visibility</p:attrName>
+                                        </p:attrNameLst>
+                                      </p:cBhvr>
+                                      <p:to>
+                                        <p:strVal val="visible"/>
+                                      </p:to>
+                                    </p:set>
+                                  </p:childTnLst>
+                                </p:cTn>
+                              </p:par>
+                              <p:par>
+                                <p:cTn id="25" presetID="1" presetClass="entr" presetSubtype="0" fill="hold" grpId="0" nodeType="withEffect">
+                                  <p:stCondLst>
+                                    <p:cond delay="0"/>
+                                  </p:stCondLst>
+                                  <p:childTnLst>
+                                    <p:set>
+                                      <p:cBhvr>
+                                        <p:cTn id="26" dur="1" fill="hold">
+                                          <p:stCondLst>
+                                            <p:cond delay="0"/>
+                                          </p:stCondLst>
+                                        </p:cTn>
+                                        <p:tgtEl>
+                                          <p:spTgt spid="52"/>
+                                        </p:tgtEl>
+                                        <p:attrNameLst>
+                                          <p:attrName>style.visibility</p:attrName>
+                                        </p:attrNameLst>
+                                      </p:cBhvr>
+                                      <p:to>
+                                        <p:strVal val="visible"/>
+                                      </p:to>
+                                    </p:set>
+                                  </p:childTnLst>
+                                </p:cTn>
+                              </p:par>
+                            </p:childTnLst>
+                          </p:cTn>
+                        </p:par>
+                      </p:childTnLst>
+                    </p:cTn>
+                  </p:par>
+                  <p:par>
+                    <p:cTn id="27" fill="hold">
+                      <p:stCondLst>
+                        <p:cond delay="indefinite"/>
+                      </p:stCondLst>
+                      <p:childTnLst>
+                        <p:par>
+                          <p:cTn id="28" fill="hold">
+                            <p:stCondLst>
+                              <p:cond delay="0"/>
+                            </p:stCondLst>
+                            <p:childTnLst>
+                              <p:par>
+                                <p:cTn id="29" presetID="1" presetClass="entr" presetSubtype="0" fill="hold" nodeType="clickEffect">
+                                  <p:stCondLst>
+                                    <p:cond delay="0"/>
+                                  </p:stCondLst>
+                                  <p:childTnLst>
+                                    <p:set>
+                                      <p:cBhvr>
+                                        <p:cTn id="30" dur="1" fill="hold">
+                                          <p:stCondLst>
+                                            <p:cond delay="0"/>
+                                          </p:stCondLst>
+                                        </p:cTn>
+                                        <p:tgtEl>
+                                          <p:spTgt spid="41"/>
+                                        </p:tgtEl>
+                                        <p:attrNameLst>
+                                          <p:attrName>style.visibility</p:attrName>
+                                        </p:attrNameLst>
+                                      </p:cBhvr>
+                                      <p:to>
+                                        <p:strVal val="visible"/>
+                                      </p:to>
+                                    </p:set>
+                                  </p:childTnLst>
+                                </p:cTn>
+                              </p:par>
+                            </p:childTnLst>
+                          </p:cTn>
+                        </p:par>
+                      </p:childTnLst>
+                    </p:cTn>
+                  </p:par>
+                  <p:par>
+                    <p:cTn id="31" fill="hold">
+                      <p:stCondLst>
+                        <p:cond delay="indefinite"/>
+                      </p:stCondLst>
+                      <p:childTnLst>
+                        <p:par>
+                          <p:cTn id="32" fill="hold">
+                            <p:stCondLst>
+                              <p:cond delay="0"/>
+                            </p:stCondLst>
+                            <p:childTnLst>
+                              <p:par>
+                                <p:cTn id="33" presetID="1" presetClass="entr" presetSubtype="0" fill="hold" nodeType="clickEffect">
+                                  <p:stCondLst>
+                                    <p:cond delay="0"/>
+                                  </p:stCondLst>
+                                  <p:childTnLst>
+                                    <p:set>
+                                      <p:cBhvr>
+                                        <p:cTn id="34" dur="1" fill="hold">
+                                          <p:stCondLst>
+                                            <p:cond delay="0"/>
+                                          </p:stCondLst>
+                                        </p:cTn>
+                                        <p:tgtEl>
+                                          <p:spTgt spid="37"/>
+                                        </p:tgtEl>
+                                        <p:attrNameLst>
+                                          <p:attrName>style.visibility</p:attrName>
+                                        </p:attrNameLst>
+                                      </p:cBhvr>
+                                      <p:to>
+                                        <p:strVal val="visible"/>
+                                      </p:to>
+                                    </p:set>
+                                  </p:childTnLst>
+                                </p:cTn>
+                              </p:par>
+                            </p:childTnLst>
+                          </p:cTn>
+                        </p:par>
+                      </p:childTnLst>
+                    </p:cTn>
+                  </p:par>
+                  <p:par>
+                    <p:cTn id="35" fill="hold">
+                      <p:stCondLst>
+                        <p:cond delay="indefinite"/>
+                      </p:stCondLst>
+                      <p:childTnLst>
+                        <p:par>
+                          <p:cTn id="36" fill="hold">
+                            <p:stCondLst>
+                              <p:cond delay="0"/>
+                            </p:stCondLst>
+                            <p:childTnLst>
+                              <p:par>
+                                <p:cTn id="37" presetID="1" presetClass="entr" presetSubtype="0" fill="hold" grpId="0" nodeType="clickEffect">
+                                  <p:stCondLst>
+                                    <p:cond delay="0"/>
+                                  </p:stCondLst>
+                                  <p:childTnLst>
+                                    <p:set>
+                                      <p:cBhvr>
+                                        <p:cTn id="38" dur="1" fill="hold">
+                                          <p:stCondLst>
+                                            <p:cond delay="0"/>
+                                          </p:stCondLst>
+                                        </p:cTn>
+                                        <p:tgtEl>
+                                          <p:spTgt spid="55"/>
+                                        </p:tgtEl>
+                                        <p:attrNameLst>
+                                          <p:attrName>style.visibility</p:attrName>
+                                        </p:attrNameLst>
+                                      </p:cBhvr>
+                                      <p:to>
+                                        <p:strVal val="visible"/>
+                                      </p:to>
+                                    </p:set>
+                                  </p:childTnLst>
+                                </p:cTn>
+                              </p:par>
+                            </p:childTnLst>
+                          </p:cTn>
+                        </p:par>
+                      </p:childTnLst>
+                    </p:cTn>
+                  </p:par>
+                  <p:par>
+                    <p:cTn id="39" fill="hold">
+                      <p:stCondLst>
+                        <p:cond delay="indefinite"/>
+                      </p:stCondLst>
+                      <p:childTnLst>
+                        <p:par>
+                          <p:cTn id="40" fill="hold">
+                            <p:stCondLst>
+                              <p:cond delay="0"/>
+                            </p:stCondLst>
+                            <p:childTnLst>
+                              <p:par>
+                                <p:cTn id="41" presetID="1" presetClass="entr" presetSubtype="0" fill="hold" nodeType="clickEffect">
+                                  <p:stCondLst>
+                                    <p:cond delay="0"/>
+                                  </p:stCondLst>
+                                  <p:childTnLst>
+                                    <p:set>
+                                      <p:cBhvr>
+                                        <p:cTn id="42" dur="1" fill="hold">
+                                          <p:stCondLst>
+                                            <p:cond delay="0"/>
+                                          </p:stCondLst>
+                                        </p:cTn>
+                                        <p:tgtEl>
+                                          <p:spTgt spid="46"/>
+                                        </p:tgtEl>
+                                        <p:attrNameLst>
+                                          <p:attrName>style.visibility</p:attrName>
+                                        </p:attrNameLst>
+                                      </p:cBhvr>
+                                      <p:to>
+                                        <p:strVal val="visible"/>
+                                      </p:to>
+                                    </p:set>
+                                  </p:childTnLst>
+                                </p:cTn>
+                              </p:par>
+                              <p:par>
+                                <p:cTn id="43" presetID="1" presetClass="entr" presetSubtype="0" fill="hold" nodeType="withEffect">
+                                  <p:stCondLst>
+                                    <p:cond delay="0"/>
+                                  </p:stCondLst>
+                                  <p:childTnLst>
+                                    <p:set>
+                                      <p:cBhvr>
+                                        <p:cTn id="44" dur="1" fill="hold">
+                                          <p:stCondLst>
+                                            <p:cond delay="0"/>
+                                          </p:stCondLst>
+                                        </p:cTn>
+                                        <p:tgtEl>
+                                          <p:spTgt spid="47"/>
+                                        </p:tgtEl>
+                                        <p:attrNameLst>
+                                          <p:attrName>style.visibility</p:attrName>
+                                        </p:attrNameLst>
+                                      </p:cBhvr>
+                                      <p:to>
+                                        <p:strVal val="visible"/>
+                                      </p:to>
+                                    </p:set>
+                                  </p:childTnLst>
+                                </p:cTn>
+                              </p:par>
+                              <p:par>
+                                <p:cTn id="45" presetID="1" presetClass="entr" presetSubtype="0" fill="hold" grpId="0" nodeType="withEffect">
+                                  <p:stCondLst>
+                                    <p:cond delay="0"/>
+                                  </p:stCondLst>
+                                  <p:childTnLst>
+                                    <p:set>
+                                      <p:cBhvr>
+                                        <p:cTn id="46" dur="1" fill="hold">
+                                          <p:stCondLst>
+                                            <p:cond delay="0"/>
+                                          </p:stCondLst>
+                                        </p:cTn>
+                                        <p:tgtEl>
+                                          <p:spTgt spid="53"/>
+                                        </p:tgtEl>
+                                        <p:attrNameLst>
+                                          <p:attrName>style.visibility</p:attrName>
+                                        </p:attrNameLst>
+                                      </p:cBhvr>
+                                      <p:to>
+                                        <p:strVal val="visible"/>
+                                      </p:to>
+                                    </p:set>
+                                  </p:childTnLst>
+                                </p:cTn>
+                              </p:par>
+                            </p:childTnLst>
+                          </p:cTn>
+                        </p:par>
+                      </p:childTnLst>
+                    </p:cTn>
+                  </p:par>
+                  <p:par>
+                    <p:cTn id="47" fill="hold">
+                      <p:stCondLst>
+                        <p:cond delay="indefinite"/>
+                      </p:stCondLst>
+                      <p:childTnLst>
+                        <p:par>
+                          <p:cTn id="48" fill="hold">
+                            <p:stCondLst>
+                              <p:cond delay="0"/>
+                            </p:stCondLst>
+                            <p:childTnLst>
+                              <p:par>
+                                <p:cTn id="49" presetID="1" presetClass="entr" presetSubtype="0" fill="hold" nodeType="clickEffect">
+                                  <p:stCondLst>
+                                    <p:cond delay="0"/>
+                                  </p:stCondLst>
+                                  <p:childTnLst>
+                                    <p:set>
+                                      <p:cBhvr>
+                                        <p:cTn id="50" dur="1" fill="hold">
+                                          <p:stCondLst>
+                                            <p:cond delay="0"/>
+                                          </p:stCondLst>
+                                        </p:cTn>
+                                        <p:tgtEl>
+                                          <p:spTgt spid="39"/>
+                                        </p:tgtEl>
+                                        <p:attrNameLst>
+                                          <p:attrName>style.visibility</p:attrName>
+                                        </p:attrNameLst>
+                                      </p:cBhvr>
+                                      <p:to>
+                                        <p:strVal val="visible"/>
+                                      </p:to>
+                                    </p:set>
+                                  </p:childTnLst>
+                                </p:cTn>
+                              </p:par>
+                            </p:childTnLst>
+                          </p:cTn>
+                        </p:par>
+                      </p:childTnLst>
+                    </p:cTn>
+                  </p:par>
+                </p:childTnLst>
+              </p:cTn>
+              <p:prevCondLst>
+                <p:cond evt="onPrev" delay="0">
+                  <p:tgtEl>
+                    <p:sldTgt/>
+                  </p:tgtEl>
+                </p:cond>
+              </p:prevCondLst>
+              <p:nextCondLst>
+                <p:cond evt="onNext" delay="0">
+                  <p:tgtEl>
+                    <p:sldTgt/>
+                  </p:tgtEl>
+                </p:cond>
+              </p:nextCondLst>
+            </p:seq>
+          </p:childTnLst>
+        </p:cTn>
+      </p:par>
+    </p:tnLst>
+    <p:bldLst>
+      <p:bldP spid="52" grpId="0"/>
+      <p:bldP spid="53" grpId="0"/>
+      <p:bldP spid="54" grpId="0" animBg="1"/>
+      <p:bldP spid="55" grpId="0" animBg="1"/>
+      <p:bldP spid="56" grpId="0" animBg="1"/>
+    </p:bldLst>
+  </p:timing>
 </p:sld>
 </file>
 
